--- a/brand/ignite-search-client-proposal.pptx
+++ b/brand/ignite-search-client-proposal.pptx
@@ -113,33 +113,33 @@
   <p:extLst>
     <p:ext uri="{521415D9-36F7-43E2-AB2F-B90AF26B5E84}">
       <p14:sectionLst xmlns:p14="http://schemas.microsoft.com/office/powerpoint/2010/main">
-        <p14:section name="Cover" id="{4b2ff090-df09-cc5b-6223-d8ecfb25cb8f}">
+        <p14:section name="Cover" id="{0a3be3cf-1b81-cb2c-2a27-b9142be370c2}">
           <p14:sldIdLst>
             <p14:sldId id="256"/>
           </p14:sldIdLst>
         </p14:section>
-        <p14:section name="Understanding" id="{38294a7e-852d-8b7e-f903-6e72d5f1231c}">
+        <p14:section name="Understanding" id="{63f71878-039e-6083-678b-214993daa51b}">
           <p14:sldIdLst>
             <p14:sldId id="257"/>
             <p14:sldId id="258"/>
           </p14:sldIdLst>
         </p14:section>
-        <p14:section name="Approach" id="{55253ba8-5fd1-3edb-3074-b46371ab5d64}">
+        <p14:section name="Approach" id="{2a476e31-1ac2-fb77-f2a0-131879a5c649}">
           <p14:sldIdLst>
             <p14:sldId id="259"/>
           </p14:sldIdLst>
         </p14:section>
-        <p14:section name="Proof" id="{c6784555-8115-d90a-2209-9b7a060305be}">
+        <p14:section name="Proof" id="{c452438b-273e-04a7-97dd-2849476d233c}">
           <p14:sldIdLst>
             <p14:sldId id="260"/>
           </p14:sldIdLst>
         </p14:section>
-        <p14:section name="Commercials" id="{ec51db70-c9ed-67d9-2d84-6a9476e73bda}">
+        <p14:section name="Commercials" id="{75012001-2c28-7e73-3f9f-8e1157de11a2}">
           <p14:sldIdLst>
             <p14:sldId id="261"/>
           </p14:sldIdLst>
         </p14:section>
-        <p14:section name="Close" id="{4b8cd9c8-72cf-81ed-99f3-5e181a7585e8}">
+        <p14:section name="Close" id="{7cfd6227-257e-cd2a-fabc-34735c52097e}">
           <p14:sldIdLst>
             <p14:sldId id="262"/>
           </p14:sldIdLst>
@@ -1189,7 +1189,7 @@
         <p:spPr>
           <a:xfrm>
             <a:off x="658368" y="548640"/>
-            <a:ext cx="2192731" cy="726948"/>
+            <a:ext cx="2306117" cy="726948"/>
           </a:xfrm>
           <a:prstGeom prst="rect">
             <a:avLst/>
@@ -1328,7 +1328,7 @@
             <a:avLst/>
           </a:prstGeom>
           <a:solidFill>
-            <a:srgbClr val="F2D416"/>
+            <a:srgbClr val="F2D216"/>
           </a:solidFill>
           <a:ln/>
         </p:spPr>
@@ -1391,7 +1391,7 @@
               <a:buNone/>
               <a:defRPr lang="en-US" sz="1300" b="1" spc="400" kern="0" dirty="0">
                 <a:solidFill>
-                  <a:srgbClr val="F2D416"/>
+                  <a:srgbClr val="F2D216"/>
                 </a:solidFill>
               </a:defRPr>
             </a:lvl1pPr>
@@ -1460,7 +1460,7 @@
         <p:spPr>
           <a:xfrm>
             <a:off x="10332720" y="5852160"/>
-            <a:ext cx="1238098" cy="410566"/>
+            <a:ext cx="1302106" cy="410566"/>
           </a:xfrm>
           <a:prstGeom prst="rect">
             <a:avLst/>
@@ -1482,7 +1482,7 @@
             <a:avLst/>
           </a:prstGeom>
           <a:solidFill>
-            <a:srgbClr val="F2D416"/>
+            <a:srgbClr val="F2D216"/>
           </a:solidFill>
           <a:ln/>
         </p:spPr>
@@ -1614,7 +1614,7 @@
         <p:spPr>
           <a:xfrm>
             <a:off x="10716768" y="6053328"/>
-            <a:ext cx="904342" cy="299923"/>
+            <a:ext cx="950976" cy="299923"/>
           </a:xfrm>
           <a:prstGeom prst="rect">
             <a:avLst/>
@@ -1748,7 +1748,7 @@
         <p:spPr>
           <a:xfrm>
             <a:off x="10716768" y="6053328"/>
-            <a:ext cx="904342" cy="299923"/>
+            <a:ext cx="950976" cy="299923"/>
           </a:xfrm>
           <a:prstGeom prst="rect">
             <a:avLst/>
@@ -1852,7 +1852,7 @@
               <a:buNone/>
               <a:defRPr lang="en-US" sz="6000" dirty="0">
                 <a:solidFill>
-                  <a:srgbClr val="F2D416"/>
+                  <a:srgbClr val="F2D216"/>
                 </a:solidFill>
               </a:defRPr>
             </a:lvl1pPr>
@@ -1921,7 +1921,7 @@
         <p:spPr>
           <a:xfrm>
             <a:off x="10332720" y="5760720"/>
-            <a:ext cx="1238098" cy="410566"/>
+            <a:ext cx="1302106" cy="410566"/>
           </a:xfrm>
           <a:prstGeom prst="rect">
             <a:avLst/>
@@ -1943,7 +1943,7 @@
             <a:avLst/>
           </a:prstGeom>
           <a:solidFill>
-            <a:srgbClr val="F2D416"/>
+            <a:srgbClr val="F2D216"/>
           </a:solidFill>
           <a:ln/>
         </p:spPr>
@@ -2423,7 +2423,7 @@
             <a:r>
               <a:rPr lang="en-US" sz="1300" b="1" spc="400" kern="0" dirty="0">
                 <a:solidFill>
-                  <a:srgbClr val="F2D416"/>
+                  <a:srgbClr val="F2D216"/>
                 </a:solidFill>
               </a:rPr>
               <a:t>WHAT WE HEARD</a:t>
@@ -2612,7 +2612,7 @@
             <a:avLst/>
           </a:prstGeom>
           <a:solidFill>
-            <a:srgbClr val="F2D416"/>
+            <a:srgbClr val="F2D216"/>
           </a:solidFill>
           <a:ln/>
         </p:spPr>
@@ -2780,7 +2780,7 @@
             <a:avLst/>
           </a:prstGeom>
           <a:solidFill>
-            <a:srgbClr val="F2D416"/>
+            <a:srgbClr val="F2D216"/>
           </a:solidFill>
           <a:ln/>
         </p:spPr>
@@ -2948,7 +2948,7 @@
             <a:avLst/>
           </a:prstGeom>
           <a:solidFill>
-            <a:srgbClr val="F2D416"/>
+            <a:srgbClr val="F2D216"/>
           </a:solidFill>
           <a:ln/>
         </p:spPr>
@@ -3245,7 +3245,7 @@
             <a:avLst/>
           </a:prstGeom>
           <a:solidFill>
-            <a:srgbClr val="F2D416"/>
+            <a:srgbClr val="F2D216"/>
           </a:solidFill>
           <a:ln/>
         </p:spPr>
@@ -3413,7 +3413,7 @@
             <a:avLst/>
           </a:prstGeom>
           <a:solidFill>
-            <a:srgbClr val="F2D416"/>
+            <a:srgbClr val="F2D216"/>
           </a:solidFill>
           <a:ln/>
         </p:spPr>
@@ -3581,7 +3581,7 @@
             <a:avLst/>
           </a:prstGeom>
           <a:solidFill>
-            <a:srgbClr val="F2D416"/>
+            <a:srgbClr val="F2D216"/>
           </a:solidFill>
           <a:ln/>
         </p:spPr>
@@ -3749,7 +3749,7 @@
             <a:avLst/>
           </a:prstGeom>
           <a:solidFill>
-            <a:srgbClr val="F2D416"/>
+            <a:srgbClr val="F2D216"/>
           </a:solidFill>
           <a:ln/>
         </p:spPr>
@@ -3988,7 +3988,7 @@
             <a:r>
               <a:rPr lang="en-US" sz="7600" dirty="0">
                 <a:solidFill>
-                  <a:srgbClr val="F2D416"/>
+                  <a:srgbClr val="F2D216"/>
                 </a:solidFill>
                 <a:latin typeface="Bebas Neue" pitchFamily="34" charset="0"/>
                 <a:ea typeface="Bebas Neue" pitchFamily="34" charset="-122"/>
@@ -4063,7 +4063,7 @@
             <a:r>
               <a:rPr lang="en-US" sz="7600" dirty="0">
                 <a:solidFill>
-                  <a:srgbClr val="F2D416"/>
+                  <a:srgbClr val="F2D216"/>
                 </a:solidFill>
                 <a:latin typeface="Bebas Neue" pitchFamily="34" charset="0"/>
                 <a:ea typeface="Bebas Neue" pitchFamily="34" charset="-122"/>
@@ -4138,7 +4138,7 @@
             <a:r>
               <a:rPr lang="en-US" sz="7600" dirty="0">
                 <a:solidFill>
-                  <a:srgbClr val="F2D416"/>
+                  <a:srgbClr val="F2D216"/>
                 </a:solidFill>
                 <a:latin typeface="Bebas Neue" pitchFamily="34" charset="0"/>
                 <a:ea typeface="Bebas Neue" pitchFamily="34" charset="-122"/>
@@ -4213,7 +4213,7 @@
             <a:r>
               <a:rPr lang="en-US" sz="7600" dirty="0">
                 <a:solidFill>
-                  <a:srgbClr val="F2D416"/>
+                  <a:srgbClr val="F2D216"/>
                 </a:solidFill>
                 <a:latin typeface="Bebas Neue" pitchFamily="34" charset="0"/>
                 <a:ea typeface="Bebas Neue" pitchFamily="34" charset="-122"/>
@@ -5365,7 +5365,7 @@
             <a:r>
               <a:rPr lang="en-US" sz="6000" dirty="0">
                 <a:solidFill>
-                  <a:srgbClr val="F2D416"/>
+                  <a:srgbClr val="F2D216"/>
                 </a:solidFill>
               </a:rPr>
               <a:t>WHAT HAPPENS NEXT</a:t>
@@ -5437,7 +5437,7 @@
         <a:srgbClr val="FAF9F6"/>
       </a:lt2>
       <a:accent1>
-        <a:srgbClr val="F2D416"/>
+        <a:srgbClr val="F2D216"/>
       </a:accent1>
       <a:accent2>
         <a:srgbClr val="FFE94F"/>

--- a/brand/ignite-search-client-proposal.pptx
+++ b/brand/ignite-search-client-proposal.pptx
@@ -113,33 +113,33 @@
   <p:extLst>
     <p:ext uri="{521415D9-36F7-43E2-AB2F-B90AF26B5E84}">
       <p14:sectionLst xmlns:p14="http://schemas.microsoft.com/office/powerpoint/2010/main">
-        <p14:section name="Cover" id="{0a3be3cf-1b81-cb2c-2a27-b9142be370c2}">
+        <p14:section name="Cover" id="{accd3ff9-b900-af93-9095-5c89723a1baf}">
           <p14:sldIdLst>
             <p14:sldId id="256"/>
           </p14:sldIdLst>
         </p14:section>
-        <p14:section name="Understanding" id="{63f71878-039e-6083-678b-214993daa51b}">
+        <p14:section name="Understanding" id="{6f97a5f3-4f06-9fb6-fd58-3994e4f63217}">
           <p14:sldIdLst>
             <p14:sldId id="257"/>
             <p14:sldId id="258"/>
           </p14:sldIdLst>
         </p14:section>
-        <p14:section name="Approach" id="{2a476e31-1ac2-fb77-f2a0-131879a5c649}">
+        <p14:section name="Approach" id="{a95e6332-c8c0-751a-6f84-581f15c29737}">
           <p14:sldIdLst>
             <p14:sldId id="259"/>
           </p14:sldIdLst>
         </p14:section>
-        <p14:section name="Proof" id="{c452438b-273e-04a7-97dd-2849476d233c}">
+        <p14:section name="Proof" id="{b2aad9e9-4b1c-e419-2fcd-41f2ac3245e6}">
           <p14:sldIdLst>
             <p14:sldId id="260"/>
           </p14:sldIdLst>
         </p14:section>
-        <p14:section name="Commercials" id="{75012001-2c28-7e73-3f9f-8e1157de11a2}">
+        <p14:section name="Commercials" id="{478fba62-96d8-3bc9-6e36-29c1353d2dfe}">
           <p14:sldIdLst>
             <p14:sldId id="261"/>
           </p14:sldIdLst>
         </p14:section>
-        <p14:section name="Close" id="{7cfd6227-257e-cd2a-fabc-34735c52097e}">
+        <p14:section name="Close" id="{f91767a3-3f69-bb8c-1c28-fb60f2b644b6}">
           <p14:sldIdLst>
             <p14:sldId id="262"/>
           </p14:sldIdLst>
@@ -2725,7 +2725,7 @@
                   <a:srgbClr val="6F6A5D"/>
                 </a:solidFill>
               </a:rPr>
-              <a:t>Say it back in their words. If they do not recognise it, the rest of the deck does not land.</a:t>
+              <a:t>Say it back in their words. If they do not recognize it, the rest of the deck does not land.</a:t>
             </a:r>
             <a:endParaRPr lang="en-US" sz="1250" dirty="0"/>
           </a:p>
